--- a/02-精益培训/02-培训材料/02-工具专项培训大纲.pptx
+++ b/02-精益培训/02-培训材料/02-工具专项培训大纲.pptx
@@ -4169,7 +4169,7 @@
                           </a:solidFill>
                           <a:latin typeface="SimHei"/>
                         </a:rPr>
-                        <a:t>紧固件行业应用</a:t>
+                        <a:t>制造工序应用</a:t>
                       </a:r>
                     </a:p>
                   </a:txBody>
@@ -4229,7 +4229,7 @@
                           </a:solidFill>
                           <a:latin typeface="SimSun"/>
                         </a:rPr>
-                        <a:t>冷镦工序的生产指令</a:t>
+                        <a:t>机加工工序的生产指令</a:t>
                       </a:r>
                     </a:p>
                   </a:txBody>
@@ -4477,7 +4477,7 @@
                           </a:solidFill>
                           <a:latin typeface="SimSun"/>
                         </a:rPr>
-                        <a:t>原材料（线材、盘元）的订货看板</a:t>
+                        <a:t>原材料（原材料、卷料）的订货看板</a:t>
                       </a:r>
                     </a:p>
                   </a:txBody>
@@ -4598,7 +4598,7 @@
               </a:spcAft>
             </a:pPr>
             <a:r>
-              <a:t>  能够设计适合紧固件生产线的看板系统</a:t>
+              <a:t>  能够设计适合生产线的看板系统</a:t>
             </a:r>
             <a:r>
               <a:rPr sz="1500" b="0">
@@ -4898,7 +4898,7 @@
               </a:spcAft>
             </a:pPr>
             <a:r>
-              <a:t>  计算实例：以某种六角螺栓为例</a:t>
+              <a:t>  计算实例：以某种工件为例</a:t>
             </a:r>
             <a:r>
               <a:rPr sz="1500" b="0">
@@ -5053,7 +5053,7 @@
               </a:spcAft>
             </a:pPr>
             <a:r>
-              <a:t>  小组任务：为一条紧固件生产线设计看板系统</a:t>
+              <a:t>  小组任务：为一条生产线设计看板系统</a:t>
             </a:r>
             <a:r>
               <a:rPr sz="1500" b="0">
@@ -5268,7 +5268,7 @@
               </a:spcAft>
             </a:pPr>
             <a:r>
-              <a:t>  能够编制紧固件工序的标准作业文件</a:t>
+              <a:t>  能够编制产品工序的标准作业文件</a:t>
             </a:r>
             <a:r>
               <a:rPr sz="1500" b="0">
@@ -5562,7 +5562,7 @@
               </a:spcAft>
             </a:pPr>
             <a:r>
-              <a:t>  实例：六角螺栓冲压工序标准作业组合票</a:t>
+              <a:t>  实例：工件冲压工序标准作业组合票</a:t>
             </a:r>
             <a:r>
               <a:rPr sz="1500" b="0">
@@ -5701,7 +5701,7 @@
               </a:spcAft>
             </a:pPr>
             <a:r>
-              <a:t>  选择一个紧固件工序（如冷镦或搓丝）</a:t>
+              <a:t>  选择一个产品工序（如机加工或精加工）</a:t>
             </a:r>
             <a:r>
               <a:rPr sz="1500" b="0">
@@ -6308,7 +6308,7 @@
               </a:spcAft>
             </a:pPr>
             <a:r>
-              <a:t>  现场观摩：一台紧固件设备的日常保全流程</a:t>
+              <a:t>  现场观摩：一台产品设备的日常保全流程</a:t>
             </a:r>
             <a:r>
               <a:rPr sz="1500" b="0">
@@ -6368,7 +6368,7 @@
               </a:spcAft>
             </a:pPr>
             <a:r>
-              <a:t>3.4 紧固件设备保全要点（30分钟）</a:t>
+              <a:t>3.4 产品设备保全要点（30分钟）</a:t>
             </a:r>
             <a:r>
               <a:rPr sz="1600" b="0">
@@ -6671,7 +6671,7 @@
               </a:spcAft>
             </a:pPr>
             <a:r>
-              <a:t>4.3 紧固件防错案例分析（25分钟）</a:t>
+              <a:t>4.3 产品防错案例分析（25分钟）</a:t>
             </a:r>
             <a:r>
               <a:rPr sz="1600" b="0">
@@ -6690,26 +6690,26 @@
               </a:spcAft>
             </a:pPr>
             <a:r>
-              <a:t>  案例1：螺纹方向防错</a:t>
-            </a:r>
-            <a:r>
-              <a:rPr sz="1500" b="0">
-                <a:solidFill>
-                  <a:srgbClr val="333333"/>
-                </a:solidFill>
-                <a:latin typeface="SimSun"/>
-              </a:rPr>
-              <a:t/>
-            </a:r>
-          </a:p>
-          <a:p>
-            <a:pPr>
-              <a:spcAft>
-                <a:spcPts val="400"/>
-              </a:spcAft>
-            </a:pPr>
-            <a:r>
-              <a:t>  问题：部分螺栓正反面混装</a:t>
+              <a:t>  案例1：加工方向防错</a:t>
+            </a:r>
+            <a:r>
+              <a:rPr sz="1500" b="0">
+                <a:solidFill>
+                  <a:srgbClr val="333333"/>
+                </a:solidFill>
+                <a:latin typeface="SimSun"/>
+              </a:rPr>
+              <a:t/>
+            </a:r>
+          </a:p>
+          <a:p>
+            <a:pPr>
+              <a:spcAft>
+                <a:spcPts val="400"/>
+              </a:spcAft>
+            </a:pPr>
+            <a:r>
+              <a:t>  问题：部分工件正反面混装</a:t>
             </a:r>
             <a:r>
               <a:rPr sz="1500" b="0">
@@ -6785,7 +6785,7 @@
               </a:spcAft>
             </a:pPr>
             <a:r>
-              <a:t>  问题：不同规格的螺栓混装</a:t>
+              <a:t>  问题：不同规格的工件混装</a:t>
             </a:r>
             <a:r>
               <a:rPr sz="1500" b="0">
@@ -7174,7 +7174,7 @@
               </a:spcAft>
             </a:pPr>
             <a:r>
-              <a:t>  了解紧固件模具更换的特殊性</a:t>
+              <a:t>  了解产品模具更换的特殊性</a:t>
             </a:r>
             <a:r>
               <a:rPr sz="1500" b="0">
@@ -7680,7 +7680,7 @@
               </a:spcAft>
             </a:pPr>
             <a:r>
-              <a:t>  快速锁定装置：用快速夹具替代螺栓</a:t>
+              <a:t>  快速锁定装置：用快速夹具替代工件</a:t>
             </a:r>
             <a:r>
               <a:rPr sz="1500" b="0">
@@ -7718,45 +7718,45 @@
               </a:spcAft>
             </a:pPr>
             <a:r>
-              <a:t>  紧固件换模的SMED改善实例</a:t>
-            </a:r>
-            <a:r>
-              <a:rPr sz="1500" b="0">
-                <a:solidFill>
-                  <a:srgbClr val="333333"/>
-                </a:solidFill>
-                <a:latin typeface="SimSun"/>
-              </a:rPr>
-              <a:t/>
-            </a:r>
-          </a:p>
-          <a:p>
-            <a:pPr>
-              <a:spcAft>
-                <a:spcPts val="400"/>
-              </a:spcAft>
-            </a:pPr>
-            <a:r>
-              <a:t>  冷镦机换模：从45分钟缩短至15分钟</a:t>
-            </a:r>
-            <a:r>
-              <a:rPr sz="1500" b="0">
-                <a:solidFill>
-                  <a:srgbClr val="333333"/>
-                </a:solidFill>
-                <a:latin typeface="SimSun"/>
-              </a:rPr>
-              <a:t/>
-            </a:r>
-          </a:p>
-          <a:p>
-            <a:pPr>
-              <a:spcAft>
-                <a:spcPts val="400"/>
-              </a:spcAft>
-            </a:pPr>
-            <a:r>
-              <a:t>  搓丝机换板：从30分钟缩短至10分钟</a:t>
+              <a:t>  产品换模的SMED改善实例</a:t>
+            </a:r>
+            <a:r>
+              <a:rPr sz="1500" b="0">
+                <a:solidFill>
+                  <a:srgbClr val="333333"/>
+                </a:solidFill>
+                <a:latin typeface="SimSun"/>
+              </a:rPr>
+              <a:t/>
+            </a:r>
+          </a:p>
+          <a:p>
+            <a:pPr>
+              <a:spcAft>
+                <a:spcPts val="400"/>
+              </a:spcAft>
+            </a:pPr>
+            <a:r>
+              <a:t>  机加工设备换模：从45分钟缩短至15分钟</a:t>
+            </a:r>
+            <a:r>
+              <a:rPr sz="1500" b="0">
+                <a:solidFill>
+                  <a:srgbClr val="333333"/>
+                </a:solidFill>
+                <a:latin typeface="SimSun"/>
+              </a:rPr>
+              <a:t/>
+            </a:r>
+          </a:p>
+          <a:p>
+            <a:pPr>
+              <a:spcAft>
+                <a:spcPts val="400"/>
+              </a:spcAft>
+            </a:pPr>
+            <a:r>
+              <a:t>  精加工设备换板：从30分钟缩短至10分钟</a:t>
             </a:r>
             <a:r>
               <a:rPr sz="1500" b="0">
@@ -8347,7 +8347,7 @@
               </a:spcAft>
             </a:pPr>
             <a:r>
-              <a:t>  紧固件质量鱼骨图实例</a:t>
+              <a:t>  产品质量鱼骨图实例</a:t>
             </a:r>
             <a:r>
               <a:rPr sz="1500" b="0">
@@ -8407,64 +8407,64 @@
               </a:spcAft>
             </a:pPr>
             <a:r>
-              <a:t>  5Why分析实例：螺栓头部裂纹问题</a:t>
-            </a:r>
-            <a:r>
-              <a:rPr sz="1500" b="0">
-                <a:solidFill>
-                  <a:srgbClr val="333333"/>
-                </a:solidFill>
-                <a:latin typeface="SimSun"/>
-              </a:rPr>
-              <a:t/>
-            </a:r>
-          </a:p>
-          <a:p>
-            <a:pPr>
-              <a:spcAft>
-                <a:spcPts val="400"/>
-              </a:spcAft>
-            </a:pPr>
-            <a:r>
-              <a:t>  Why 1：为什么螺栓头部有裂纹？→ 因为冷镦时材料流动不均匀</a:t>
-            </a:r>
-            <a:r>
-              <a:rPr sz="1500" b="0">
-                <a:solidFill>
-                  <a:srgbClr val="333333"/>
-                </a:solidFill>
-                <a:latin typeface="SimSun"/>
-              </a:rPr>
-              <a:t/>
-            </a:r>
-          </a:p>
-          <a:p>
-            <a:pPr>
-              <a:spcAft>
-                <a:spcPts val="400"/>
-              </a:spcAft>
-            </a:pPr>
-            <a:r>
-              <a:t>  Why 2：为什么材料流动不均匀？→ 因为线材硬度不均匀</a:t>
-            </a:r>
-            <a:r>
-              <a:rPr sz="1500" b="0">
-                <a:solidFill>
-                  <a:srgbClr val="333333"/>
-                </a:solidFill>
-                <a:latin typeface="SimSun"/>
-              </a:rPr>
-              <a:t/>
-            </a:r>
-          </a:p>
-          <a:p>
-            <a:pPr>
-              <a:spcAft>
-                <a:spcPts val="400"/>
-              </a:spcAft>
-            </a:pPr>
-            <a:r>
-              <a:t>  Why 3：为什么线材硬度不均匀？→ 因为来料检验未检测硬度</a:t>
+              <a:t>  5Why分析实例：工件表面裂纹问题</a:t>
+            </a:r>
+            <a:r>
+              <a:rPr sz="1500" b="0">
+                <a:solidFill>
+                  <a:srgbClr val="333333"/>
+                </a:solidFill>
+                <a:latin typeface="SimSun"/>
+              </a:rPr>
+              <a:t/>
+            </a:r>
+          </a:p>
+          <a:p>
+            <a:pPr>
+              <a:spcAft>
+                <a:spcPts val="400"/>
+              </a:spcAft>
+            </a:pPr>
+            <a:r>
+              <a:t>  Why 1：为什么工件头部有裂纹？→ 因为机加工时材料流动不均匀</a:t>
+            </a:r>
+            <a:r>
+              <a:rPr sz="1500" b="0">
+                <a:solidFill>
+                  <a:srgbClr val="333333"/>
+                </a:solidFill>
+                <a:latin typeface="SimSun"/>
+              </a:rPr>
+              <a:t/>
+            </a:r>
+          </a:p>
+          <a:p>
+            <a:pPr>
+              <a:spcAft>
+                <a:spcPts val="400"/>
+              </a:spcAft>
+            </a:pPr>
+            <a:r>
+              <a:t>  Why 2：为什么材料流动不均匀？→ 因为原材料硬度不均匀</a:t>
+            </a:r>
+            <a:r>
+              <a:rPr sz="1500" b="0">
+                <a:solidFill>
+                  <a:srgbClr val="333333"/>
+                </a:solidFill>
+                <a:latin typeface="SimSun"/>
+              </a:rPr>
+              <a:t/>
+            </a:r>
+          </a:p>
+          <a:p>
+            <a:pPr>
+              <a:spcAft>
+                <a:spcPts val="400"/>
+              </a:spcAft>
+            </a:pPr>
+            <a:r>
+              <a:t>  Why 3：为什么原材料硬度不均匀？→ 因为来料检验未检测硬度</a:t>
             </a:r>
             <a:r>
               <a:rPr sz="1500" b="0">
@@ -8843,7 +8843,7 @@
               </a:spcAft>
             </a:pPr>
             <a:r>
-              <a:t>  模拟场景：某紧固件生产线面临以下问题</a:t>
+              <a:t>  模拟场景：某生产线面临以下问题</a:t>
             </a:r>
             <a:r>
               <a:rPr sz="1500" b="0">
@@ -9710,7 +9710,7 @@
                           </a:solidFill>
                           <a:latin typeface="SimSun"/>
                         </a:rPr>
-                        <a:t>紧固件行业案例分析</a:t>
+                        <a:t>制造业案例分析</a:t>
                       </a:r>
                     </a:p>
                   </a:txBody>
@@ -10629,7 +10629,7 @@
               </a:spcAft>
             </a:pPr>
             <a:r>
-              <a:t>  《紧固件行业改善案例集》（内部编制）</a:t>
+              <a:t>  《制造业改善案例集》（内部编制）</a:t>
             </a:r>
             <a:r>
               <a:rPr sz="1500" b="0">
